--- a/Planning docs/Slides/lesson-24-3-teacher-slides.pptx
+++ b/Planning docs/Slides/lesson-24-3-teacher-slides.pptx
@@ -4980,7 +4980,7 @@
                 <a:ea typeface="Calibri" pitchFamily="34" charset="-122"/>
                 <a:cs typeface="Calibri" pitchFamily="34" charset="-120"/>
               </a:rPr>
-              <a:t>•  Explaining facts in your own words</a:t>
+              <a:t>•  The author uses sensory language to describe medieval towns. Find one detail that appeals to each sense: sight, sound, and smell.</a:t>
             </a:r>
             <a:endParaRPr lang="en-US" sz="1500" dirty="0"/>
           </a:p>
@@ -4997,24 +4997,7 @@
                 <a:ea typeface="Calibri" pitchFamily="34" charset="-122"/>
                 <a:cs typeface="Calibri" pitchFamily="34" charset="-120"/>
               </a:rPr>
-              <a:t>•  Look at the letters around the dot in each word. Count: vowel, consonant, consonant, vowel. That's the VCCV pattern .</a:t>
-            </a:r>
-            <a:endParaRPr lang="en-US" sz="1500" dirty="0"/>
-          </a:p>
-          <a:p>
-            <a:pPr indent="0" marL="0">
-              <a:buNone/>
-            </a:pPr>
-            <a:r>
-              <a:rPr lang="en-US" sz="1500" dirty="0">
-                <a:solidFill>
-                  <a:srgbClr val="1E293B"/>
-                </a:solidFill>
-                <a:latin typeface="Calibri" pitchFamily="34" charset="0"/>
-                <a:ea typeface="Calibri" pitchFamily="34" charset="-122"/>
-                <a:cs typeface="Calibri" pitchFamily="34" charset="-120"/>
-              </a:rPr>
-              <a:t>•  Where does the dot fall — before, between, or after the two consonants?</a:t>
+              <a:t>•  The article says towns were 'full of life' despite being loud and smelly. What does the author mean by that — what was alive about them?</a:t>
             </a:r>
             <a:endParaRPr lang="en-US" sz="1500" dirty="0"/>
           </a:p>
